--- a/classes/parte-9-forense-digital-y-respuesta-a-incidentes/201-fundamentos-de-dfir-y-cadena-de-custodia/clase-201-presentacion.pptx
+++ b/classes/parte-9-forense-digital-y-respuesta-a-incidentes/201-fundamentos-de-dfir-y-cadena-de-custodia/clase-201-presentacion.pptx
@@ -17,6 +17,11 @@
     <p:sldId id="265" r:id="rId16"/>
     <p:sldId id="266" r:id="rId17"/>
     <p:sldId id="267" r:id="rId18"/>
+    <p:sldId id="268" r:id="rId19"/>
+    <p:sldId id="269" r:id="rId20"/>
+    <p:sldId id="270" r:id="rId21"/>
+    <p:sldId id="271" r:id="rId22"/>
+    <p:sldId id="272" r:id="rId23"/>
   </p:sldIdLst>
   <p:sldSz cx="9144000" cy="6858000" type="screen4x3"/>
   <p:notesSz cx="6858000" cy="9144000"/>
@@ -3198,7 +3203,7 @@
                   <a:srgbClr val="0B3D2E"/>
                 </a:solidFill>
               </a:rPr>
-              <a:t>⚠️ Errores comunes</a:t>
+              <a:t>🧰 Herramientas y preparación</a:t>
             </a:r>
           </a:p>
         </p:txBody>
@@ -3236,67 +3241,37 @@
                   <a:srgbClr val="22282E"/>
                 </a:solidFill>
               </a:rPr>
-              <a:t>•  sha256sum -c responde FAILED inesperadamente — La evidencia se alteró (montaje sin write-blocker). Reinicia desde el original con bloqueo de escritura.</a:t>
-            </a:r>
-          </a:p>
-          <a:p>
-            <a:pPr>
-              <a:spcAft>
-                <a:spcPts val="600"/>
-              </a:spcAft>
-            </a:pPr>
-            <a:r>
-              <a:rPr sz="1500">
-                <a:solidFill>
-                  <a:srgbClr val="22282E"/>
-                </a:solidFill>
-              </a:rPr>
-              <a:t>•  No recuerdas el orden de las acciones — No tomaste notas contemporáneas. Usa un cuaderno foliado o log con marca de tiempo.</a:t>
-            </a:r>
-          </a:p>
-          <a:p>
-            <a:pPr>
-              <a:spcAft>
-                <a:spcPts val="600"/>
-              </a:spcAft>
-            </a:pPr>
-            <a:r>
-              <a:rPr sz="1500">
-                <a:solidFill>
-                  <a:srgbClr val="22282E"/>
-                </a:solidFill>
-              </a:rPr>
-              <a:t>•  El tribunal rechaza la evidencia — Hueco en la cadena de custodia. Todo cambio de manos debe estar firmado y fechado.</a:t>
-            </a:r>
-          </a:p>
-          <a:p>
-            <a:pPr>
-              <a:spcAft>
-                <a:spcPts val="600"/>
-              </a:spcAft>
-            </a:pPr>
-            <a:r>
-              <a:rPr sz="1500">
-                <a:solidFill>
-                  <a:srgbClr val="22282E"/>
-                </a:solidFill>
-              </a:rPr>
-              <a:t>•  Hashes distintos en dos herramientas — Rutas o codificación distinta, o el archivo cambió. Verifica que apuntas al mismo objeto.</a:t>
-            </a:r>
-          </a:p>
-          <a:p>
-            <a:pPr>
-              <a:spcAft>
-                <a:spcPts val="600"/>
-              </a:spcAft>
-            </a:pPr>
-            <a:r>
-              <a:rPr sz="1500">
-                <a:solidFill>
-                  <a:srgbClr val="22282E"/>
-                </a:solidFill>
-              </a:rPr>
-              <a:t>•  Zona horaria confusa en el informe — Usaste hora local sin indicar offset. Registra siempre en UTC.</a:t>
+              <a:t>•  Entorno: máquina virtual con Kali Linux o SIFT Workstation (SANS). Trabaja siempre en un laboratorio aislado y con equipos propios o con autorización explícita por escrito.</a:t>
+            </a:r>
+          </a:p>
+          <a:p>
+            <a:pPr>
+              <a:spcAft>
+                <a:spcPts val="600"/>
+              </a:spcAft>
+            </a:pPr>
+            <a:r>
+              <a:rPr sz="1500">
+                <a:solidFill>
+                  <a:srgbClr val="22282E"/>
+                </a:solidFill>
+              </a:rPr>
+              <a:t>•  Herramientas: sha256sum, md5sum, hashdeep, un editor de texto para el formulario de custodia, y una plantilla de cadena de custodia (puedes usar la de NIST o SANS).</a:t>
+            </a:r>
+          </a:p>
+          <a:p>
+            <a:pPr>
+              <a:spcAft>
+                <a:spcPts val="600"/>
+              </a:spcAft>
+            </a:pPr>
+            <a:r>
+              <a:rPr sz="1500">
+                <a:solidFill>
+                  <a:srgbClr val="22282E"/>
+                </a:solidFill>
+              </a:rPr>
+              <a:t>•  Material físico simulado: bolsas antiestáticas con etiqueta, marcador indeleble, cuaderno de notas foliado.</a:t>
             </a:r>
           </a:p>
         </p:txBody>
@@ -3347,7 +3322,7 @@
                   <a:srgbClr val="0B3D2E"/>
                 </a:solidFill>
               </a:rPr>
-              <a:t>❓ Preguntas frecuentes</a:t>
+              <a:t>🧪 Laboratorio guiado</a:t>
             </a:r>
           </a:p>
         </p:txBody>
@@ -3385,97 +3360,97 @@
                   <a:srgbClr val="22282E"/>
                 </a:solidFill>
               </a:rPr>
-              <a:t>•  ❓ ¿Forense e incidente son lo mismo?</a:t>
-            </a:r>
-          </a:p>
-          <a:p>
-            <a:pPr>
-              <a:spcAft>
-                <a:spcPts val="600"/>
-              </a:spcAft>
-            </a:pPr>
-            <a:r>
-              <a:rPr sz="1500">
-                <a:solidFill>
-                  <a:srgbClr val="22282E"/>
-                </a:solidFill>
-              </a:rPr>
-              <a:t>•  No. La respuesta a incidentes prioriza contener y recuperar rápido; la forense prioriza el rigor y la reconstrucción defendible. DFIR las integra.</a:t>
-            </a:r>
-          </a:p>
-          <a:p>
-            <a:pPr>
-              <a:spcAft>
-                <a:spcPts val="600"/>
-              </a:spcAft>
-            </a:pPr>
-            <a:r>
-              <a:rPr sz="1500">
-                <a:solidFill>
-                  <a:srgbClr val="22282E"/>
-                </a:solidFill>
-              </a:rPr>
-              <a:t>•  ❓ ¿MD5 sirve todavía?</a:t>
-            </a:r>
-          </a:p>
-          <a:p>
-            <a:pPr>
-              <a:spcAft>
-                <a:spcPts val="600"/>
-              </a:spcAft>
-            </a:pPr>
-            <a:r>
-              <a:rPr sz="1500">
-                <a:solidFill>
-                  <a:srgbClr val="22282E"/>
-                </a:solidFill>
-              </a:rPr>
-              <a:t>•  Para deduplicación y verificación rápida sí, pero por colisiones conocidas prefiere SHA-256 en evidencia que pueda ir a juicio.</a:t>
-            </a:r>
-          </a:p>
-          <a:p>
-            <a:pPr>
-              <a:spcAft>
-                <a:spcPts val="600"/>
-              </a:spcAft>
-            </a:pPr>
-            <a:r>
-              <a:rPr sz="1500">
-                <a:solidFill>
-                  <a:srgbClr val="22282E"/>
-                </a:solidFill>
-              </a:rPr>
-              <a:t>•  ❓ ¿Puedo analizar el disco original directamente?</a:t>
-            </a:r>
-          </a:p>
-          <a:p>
-            <a:pPr>
-              <a:spcAft>
-                <a:spcPts val="600"/>
-              </a:spcAft>
-            </a:pPr>
-            <a:r>
-              <a:rPr sz="1500">
-                <a:solidFill>
-                  <a:srgbClr val="22282E"/>
-                </a:solidFill>
-              </a:rPr>
-              <a:t>•  No. Siempre trabajas sobre una copia forense verificada; el original se preserva con bloqueo de escritura.</a:t>
-            </a:r>
-          </a:p>
-          <a:p>
-            <a:pPr>
-              <a:spcAft>
-                <a:spcPts val="600"/>
-              </a:spcAft>
-            </a:pPr>
-            <a:r>
-              <a:rPr sz="1500">
-                <a:solidFill>
-                  <a:srgbClr val="22282E"/>
-                </a:solidFill>
-              </a:rPr>
-              <a:t>•  ❓ ¿Qué hago si contamino evidencia sin querer?</a:t>
+              <a:t>•  Crea un archivo que simule evidencia adquirida:</a:t>
+            </a:r>
+          </a:p>
+          <a:p>
+            <a:pPr>
+              <a:spcAft>
+                <a:spcPts val="600"/>
+              </a:spcAft>
+            </a:pPr>
+            <a:r>
+              <a:rPr sz="1500">
+                <a:solidFill>
+                  <a:srgbClr val="22282E"/>
+                </a:solidFill>
+              </a:rPr>
+              <a:t>•  Calcula y guarda su hash de integridad al momento de la "adquisición":</a:t>
+            </a:r>
+          </a:p>
+          <a:p>
+            <a:pPr>
+              <a:spcAft>
+                <a:spcPts val="600"/>
+              </a:spcAft>
+            </a:pPr>
+            <a:r>
+              <a:rPr sz="1500">
+                <a:solidFill>
+                  <a:srgbClr val="22282E"/>
+                </a:solidFill>
+              </a:rPr>
+              <a:t>•  Redacta el formulario de cadena de custodia con estos campos mínimos:</a:t>
+            </a:r>
+          </a:p>
+          <a:p>
+            <a:pPr>
+              <a:spcAft>
+                <a:spcPts val="600"/>
+              </a:spcAft>
+            </a:pPr>
+            <a:r>
+              <a:rPr sz="1500">
+                <a:solidFill>
+                  <a:srgbClr val="22282E"/>
+                </a:solidFill>
+              </a:rPr>
+              <a:t>•  Identificador único del ítem (ej. CASO-2026-001-ITEM-01).</a:t>
+            </a:r>
+          </a:p>
+          <a:p>
+            <a:pPr>
+              <a:spcAft>
+                <a:spcPts val="600"/>
+              </a:spcAft>
+            </a:pPr>
+            <a:r>
+              <a:rPr sz="1500">
+                <a:solidFill>
+                  <a:srgbClr val="22282E"/>
+                </a:solidFill>
+              </a:rPr>
+              <a:t>•  Descripción, fabricante, número de serie.</a:t>
+            </a:r>
+          </a:p>
+          <a:p>
+            <a:pPr>
+              <a:spcAft>
+                <a:spcPts val="600"/>
+              </a:spcAft>
+            </a:pPr>
+            <a:r>
+              <a:rPr sz="1500">
+                <a:solidFill>
+                  <a:srgbClr val="22282E"/>
+                </a:solidFill>
+              </a:rPr>
+              <a:t>•  Fecha/hora de adquisición y zona horaria (UTC recomendado).</a:t>
+            </a:r>
+          </a:p>
+          <a:p>
+            <a:pPr>
+              <a:spcAft>
+                <a:spcPts val="600"/>
+              </a:spcAft>
+            </a:pPr>
+            <a:r>
+              <a:rPr sz="1500">
+                <a:solidFill>
+                  <a:srgbClr val="22282E"/>
+                </a:solidFill>
+              </a:rPr>
+              <a:t>•  Nombre y firma de quien adquirió.</a:t>
             </a:r>
           </a:p>
         </p:txBody>
@@ -3526,7 +3501,7 @@
                   <a:srgbClr val="0B3D2E"/>
                 </a:solidFill>
               </a:rPr>
-              <a:t>🔗 Referencias</a:t>
+              <a:t>✍️ Ejercicios</a:t>
             </a:r>
           </a:p>
         </p:txBody>
@@ -3564,56 +3539,727 @@
                   <a:srgbClr val="22282E"/>
                 </a:solidFill>
               </a:rPr>
-              <a:t>•  NIST SP 800-86 — Guide to Integrating Forensic Techniques into Incident Response: &lt;https://csrc.nist.gov/publications/detail/sp/800-86/final&gt;</a:t>
-            </a:r>
-          </a:p>
-          <a:p>
-            <a:pPr>
-              <a:spcAft>
-                <a:spcPts val="600"/>
-              </a:spcAft>
-            </a:pPr>
-            <a:r>
-              <a:rPr sz="1500">
-                <a:solidFill>
-                  <a:srgbClr val="22282E"/>
-                </a:solidFill>
-              </a:rPr>
-              <a:t>•  Carrier, B. — File System Forensic Analysis, Addison-Wesley 2005.</a:t>
-            </a:r>
-          </a:p>
-          <a:p>
-            <a:pPr>
-              <a:spcAft>
-                <a:spcPts val="600"/>
-              </a:spcAft>
-            </a:pPr>
-            <a:r>
-              <a:rPr sz="1500">
-                <a:solidFill>
-                  <a:srgbClr val="22282E"/>
-                </a:solidFill>
-              </a:rPr>
-              <a:t>•  SWGDE — Best Practices for Digital Evidence Collection: &lt;https://www.swgde.org/&gt;</a:t>
-            </a:r>
-          </a:p>
-          <a:p>
-            <a:pPr>
-              <a:spcAft>
-                <a:spcPts val="600"/>
-              </a:spcAft>
-            </a:pPr>
-            <a:r>
-              <a:rPr sz="1500">
-                <a:solidFill>
-                  <a:srgbClr val="22282E"/>
-                </a:solidFill>
-              </a:rPr>
-              <a:t>•  SANS DFIR — Chain of Custody resources: &lt;https://www.sans.org/&gt;</a:t>
-            </a:r>
-          </a:p>
-        </p:txBody>
-      </p:sp>
+              <a:t>•  Enumera, en orden de volatilidad, siete fuentes de evidencia de un portátil encendido.</a:t>
+            </a:r>
+          </a:p>
+          <a:p>
+            <a:pPr>
+              <a:spcAft>
+                <a:spcPts val="600"/>
+              </a:spcAft>
+            </a:pPr>
+            <a:r>
+              <a:rPr sz="1500">
+                <a:solidFill>
+                  <a:srgbClr val="22282E"/>
+                </a:solidFill>
+              </a:rPr>
+              <a:t>•  Redacta una plantilla de cadena de custodia con al menos diez campos.</a:t>
+            </a:r>
+          </a:p>
+          <a:p>
+            <a:pPr>
+              <a:spcAft>
+                <a:spcPts val="600"/>
+              </a:spcAft>
+            </a:pPr>
+            <a:r>
+              <a:rPr sz="1500">
+                <a:solidFill>
+                  <a:srgbClr val="22282E"/>
+                </a:solidFill>
+              </a:rPr>
+              <a:t>•  Explica con un ejemplo por qué apagar "correctamente" un equipo puede destruir evidencia.</a:t>
+            </a:r>
+          </a:p>
+          <a:p>
+            <a:pPr>
+              <a:spcAft>
+                <a:spcPts val="600"/>
+              </a:spcAft>
+            </a:pPr>
+            <a:r>
+              <a:rPr sz="1500">
+                <a:solidFill>
+                  <a:srgbClr val="22282E"/>
+                </a:solidFill>
+              </a:rPr>
+              <a:t>•  Genera hashes MD5 y SHA-256 del mismo archivo y explica por qué preferimos SHA-256.</a:t>
+            </a:r>
+          </a:p>
+          <a:p>
+            <a:pPr>
+              <a:spcAft>
+                <a:spcPts val="600"/>
+              </a:spcAft>
+            </a:pPr>
+            <a:r>
+              <a:rPr sz="1500">
+                <a:solidFill>
+                  <a:srgbClr val="22282E"/>
+                </a:solidFill>
+              </a:rPr>
+              <a:t>•  Diseña un procedimiento para etiquetar y fotografiar tres dispositivos incautados.</a:t>
+            </a:r>
+          </a:p>
+          <a:p>
+            <a:pPr>
+              <a:spcAft>
+                <a:spcPts val="600"/>
+              </a:spcAft>
+            </a:pPr>
+            <a:r>
+              <a:rPr sz="1500">
+                <a:solidFill>
+                  <a:srgbClr val="22282E"/>
+                </a:solidFill>
+              </a:rPr>
+              <a:t>•  Analiza un caso: un analista copió archivos con arrastrar-y-soltar desde el disco sospechoso. ¿Qué cinco cosas hizo mal?</a:t>
+            </a:r>
+          </a:p>
+        </p:txBody>
+      </p:sp>
+    </p:spTree>
+  </p:cSld>
+  <p:clrMapOvr>
+    <a:masterClrMapping/>
+  </p:clrMapOvr>
+</p:sld>
+</file>
+
+<file path=ppt/slides/slide13.xml><?xml version="1.0" encoding="utf-8"?>
+<p:sld xmlns:a="http://schemas.openxmlformats.org/drawingml/2006/main" xmlns:p="http://schemas.openxmlformats.org/presentationml/2006/main" xmlns:r="http://schemas.openxmlformats.org/officeDocument/2006/relationships">
+  <p:cSld>
+    <p:spTree>
+      <p:nvGrpSpPr>
+        <p:cNvPr id="1" name=""/>
+        <p:cNvGrpSpPr/>
+        <p:nvPr/>
+      </p:nvGrpSpPr>
+      <p:grpSpPr/>
+      <p:sp>
+        <p:nvSpPr>
+          <p:cNvPr id="2" name="TextBox 1"/>
+          <p:cNvSpPr txBox="1"/>
+          <p:nvPr/>
+        </p:nvSpPr>
+        <p:spPr>
+          <a:xfrm>
+            <a:off x="457200" y="320040"/>
+            <a:ext cx="8229600" cy="822960"/>
+          </a:xfrm>
+          <a:prstGeom prst="rect">
+            <a:avLst/>
+          </a:prstGeom>
+          <a:noFill/>
+        </p:spPr>
+        <p:txBody>
+          <a:bodyPr wrap="square">
+            <a:spAutoFit/>
+          </a:bodyPr>
+          <a:lstStyle/>
+          <a:p>
+            <a:r>
+              <a:rPr sz="2600" b="1">
+                <a:solidFill>
+                  <a:srgbClr val="0B3D2E"/>
+                </a:solidFill>
+              </a:rPr>
+              <a:t>📝 Reto verificable</a:t>
+            </a:r>
+          </a:p>
+        </p:txBody>
+      </p:sp>
+      <p:sp>
+        <p:nvSpPr>
+          <p:cNvPr id="3" name="TextBox 2"/>
+          <p:cNvSpPr txBox="1"/>
+          <p:nvPr/>
+        </p:nvSpPr>
+        <p:spPr>
+          <a:xfrm>
+            <a:off x="457200" y="1280160"/>
+            <a:ext cx="8229600" cy="4937760"/>
+          </a:xfrm>
+          <a:prstGeom prst="rect">
+            <a:avLst/>
+          </a:prstGeom>
+          <a:noFill/>
+        </p:spPr>
+        <p:txBody>
+          <a:bodyPr wrap="square">
+            <a:spAutoFit/>
+          </a:bodyPr>
+          <a:lstStyle/>
+          <a:p>
+            <a:pPr>
+              <a:spcAft>
+                <a:spcPts val="600"/>
+              </a:spcAft>
+            </a:pPr>
+            <a:r>
+              <a:rPr sz="1500">
+                <a:solidFill>
+                  <a:srgbClr val="22282E"/>
+                </a:solidFill>
+              </a:rPr>
+              <a:t>•  Adquiere una imagen de un pendrive propio (o de un archivo .img que crees), documenta su cadena de custodia completa y verifica integridad antes y después de una transferencia simulada.</a:t>
+            </a:r>
+          </a:p>
+          <a:p>
+            <a:pPr>
+              <a:spcAft>
+                <a:spcPts val="600"/>
+              </a:spcAft>
+            </a:pPr>
+            <a:r>
+              <a:rPr sz="1500">
+                <a:solidFill>
+                  <a:srgbClr val="22282E"/>
+                </a:solidFill>
+              </a:rPr>
+              <a:t>•  Criterio de aceptación: entregas (a) el .img, (b) su hash SHA-256 en un archivo separado, (c) un formulario de custodia con al menos una transferencia registrada, y (d) la salida de sha256sum -c…</a:t>
+            </a:r>
+          </a:p>
+        </p:txBody>
+      </p:sp>
+    </p:spTree>
+  </p:cSld>
+  <p:clrMapOvr>
+    <a:masterClrMapping/>
+  </p:clrMapOvr>
+</p:sld>
+</file>
+
+<file path=ppt/slides/slide14.xml><?xml version="1.0" encoding="utf-8"?>
+<p:sld xmlns:a="http://schemas.openxmlformats.org/drawingml/2006/main" xmlns:p="http://schemas.openxmlformats.org/presentationml/2006/main" xmlns:r="http://schemas.openxmlformats.org/officeDocument/2006/relationships">
+  <p:cSld>
+    <p:spTree>
+      <p:nvGrpSpPr>
+        <p:cNvPr id="1" name=""/>
+        <p:cNvGrpSpPr/>
+        <p:nvPr/>
+      </p:nvGrpSpPr>
+      <p:grpSpPr/>
+      <p:sp>
+        <p:nvSpPr>
+          <p:cNvPr id="2" name="TextBox 1"/>
+          <p:cNvSpPr txBox="1"/>
+          <p:nvPr/>
+        </p:nvSpPr>
+        <p:spPr>
+          <a:xfrm>
+            <a:off x="457200" y="320040"/>
+            <a:ext cx="8229600" cy="822960"/>
+          </a:xfrm>
+          <a:prstGeom prst="rect">
+            <a:avLst/>
+          </a:prstGeom>
+          <a:noFill/>
+        </p:spPr>
+        <p:txBody>
+          <a:bodyPr wrap="square">
+            <a:spAutoFit/>
+          </a:bodyPr>
+          <a:lstStyle/>
+          <a:p>
+            <a:r>
+              <a:rPr sz="2600" b="1">
+                <a:solidFill>
+                  <a:srgbClr val="0B3D2E"/>
+                </a:solidFill>
+              </a:rPr>
+              <a:t>⚠️ Errores comunes</a:t>
+            </a:r>
+          </a:p>
+        </p:txBody>
+      </p:sp>
+      <p:sp>
+        <p:nvSpPr>
+          <p:cNvPr id="3" name="TextBox 2"/>
+          <p:cNvSpPr txBox="1"/>
+          <p:nvPr/>
+        </p:nvSpPr>
+        <p:spPr>
+          <a:xfrm>
+            <a:off x="457200" y="1280160"/>
+            <a:ext cx="8229600" cy="4937760"/>
+          </a:xfrm>
+          <a:prstGeom prst="rect">
+            <a:avLst/>
+          </a:prstGeom>
+          <a:noFill/>
+        </p:spPr>
+        <p:txBody>
+          <a:bodyPr wrap="square">
+            <a:spAutoFit/>
+          </a:bodyPr>
+          <a:lstStyle/>
+          <a:p>
+            <a:pPr>
+              <a:spcAft>
+                <a:spcPts val="600"/>
+              </a:spcAft>
+            </a:pPr>
+            <a:r>
+              <a:rPr sz="1500">
+                <a:solidFill>
+                  <a:srgbClr val="22282E"/>
+                </a:solidFill>
+              </a:rPr>
+              <a:t>•  sha256sum -c responde FAILED inesperadamente — La evidencia se alteró (montaje sin write-blocker). Reinicia desde el original con bloqueo de escritura.</a:t>
+            </a:r>
+          </a:p>
+          <a:p>
+            <a:pPr>
+              <a:spcAft>
+                <a:spcPts val="600"/>
+              </a:spcAft>
+            </a:pPr>
+            <a:r>
+              <a:rPr sz="1500">
+                <a:solidFill>
+                  <a:srgbClr val="22282E"/>
+                </a:solidFill>
+              </a:rPr>
+              <a:t>•  No recuerdas el orden de las acciones — No tomaste notas contemporáneas. Usa un cuaderno foliado o log con marca de tiempo.</a:t>
+            </a:r>
+          </a:p>
+          <a:p>
+            <a:pPr>
+              <a:spcAft>
+                <a:spcPts val="600"/>
+              </a:spcAft>
+            </a:pPr>
+            <a:r>
+              <a:rPr sz="1500">
+                <a:solidFill>
+                  <a:srgbClr val="22282E"/>
+                </a:solidFill>
+              </a:rPr>
+              <a:t>•  El tribunal rechaza la evidencia — Hueco en la cadena de custodia. Todo cambio de manos debe estar firmado y fechado.</a:t>
+            </a:r>
+          </a:p>
+          <a:p>
+            <a:pPr>
+              <a:spcAft>
+                <a:spcPts val="600"/>
+              </a:spcAft>
+            </a:pPr>
+            <a:r>
+              <a:rPr sz="1500">
+                <a:solidFill>
+                  <a:srgbClr val="22282E"/>
+                </a:solidFill>
+              </a:rPr>
+              <a:t>•  Hashes distintos en dos herramientas — Rutas o codificación distinta, o el archivo cambió. Verifica que apuntas al mismo objeto.</a:t>
+            </a:r>
+          </a:p>
+          <a:p>
+            <a:pPr>
+              <a:spcAft>
+                <a:spcPts val="600"/>
+              </a:spcAft>
+            </a:pPr>
+            <a:r>
+              <a:rPr sz="1500">
+                <a:solidFill>
+                  <a:srgbClr val="22282E"/>
+                </a:solidFill>
+              </a:rPr>
+              <a:t>•  Zona horaria confusa en el informe — Usaste hora local sin indicar offset. Registra siempre en UTC.</a:t>
+            </a:r>
+          </a:p>
+        </p:txBody>
+      </p:sp>
+    </p:spTree>
+  </p:cSld>
+  <p:clrMapOvr>
+    <a:masterClrMapping/>
+  </p:clrMapOvr>
+</p:sld>
+</file>
+
+<file path=ppt/slides/slide15.xml><?xml version="1.0" encoding="utf-8"?>
+<p:sld xmlns:a="http://schemas.openxmlformats.org/drawingml/2006/main" xmlns:p="http://schemas.openxmlformats.org/presentationml/2006/main" xmlns:r="http://schemas.openxmlformats.org/officeDocument/2006/relationships">
+  <p:cSld>
+    <p:spTree>
+      <p:nvGrpSpPr>
+        <p:cNvPr id="1" name=""/>
+        <p:cNvGrpSpPr/>
+        <p:nvPr/>
+      </p:nvGrpSpPr>
+      <p:grpSpPr/>
+      <p:sp>
+        <p:nvSpPr>
+          <p:cNvPr id="2" name="TextBox 1"/>
+          <p:cNvSpPr txBox="1"/>
+          <p:nvPr/>
+        </p:nvSpPr>
+        <p:spPr>
+          <a:xfrm>
+            <a:off x="457200" y="320040"/>
+            <a:ext cx="8229600" cy="822960"/>
+          </a:xfrm>
+          <a:prstGeom prst="rect">
+            <a:avLst/>
+          </a:prstGeom>
+          <a:noFill/>
+        </p:spPr>
+        <p:txBody>
+          <a:bodyPr wrap="square">
+            <a:spAutoFit/>
+          </a:bodyPr>
+          <a:lstStyle/>
+          <a:p>
+            <a:r>
+              <a:rPr sz="2600" b="1">
+                <a:solidFill>
+                  <a:srgbClr val="0B3D2E"/>
+                </a:solidFill>
+              </a:rPr>
+              <a:t>❓ Preguntas frecuentes</a:t>
+            </a:r>
+          </a:p>
+        </p:txBody>
+      </p:sp>
+      <p:sp>
+        <p:nvSpPr>
+          <p:cNvPr id="3" name="TextBox 2"/>
+          <p:cNvSpPr txBox="1"/>
+          <p:nvPr/>
+        </p:nvSpPr>
+        <p:spPr>
+          <a:xfrm>
+            <a:off x="457200" y="1280160"/>
+            <a:ext cx="8229600" cy="4937760"/>
+          </a:xfrm>
+          <a:prstGeom prst="rect">
+            <a:avLst/>
+          </a:prstGeom>
+          <a:noFill/>
+        </p:spPr>
+        <p:txBody>
+          <a:bodyPr wrap="square">
+            <a:spAutoFit/>
+          </a:bodyPr>
+          <a:lstStyle/>
+          <a:p>
+            <a:pPr>
+              <a:spcAft>
+                <a:spcPts val="600"/>
+              </a:spcAft>
+            </a:pPr>
+            <a:r>
+              <a:rPr sz="1500">
+                <a:solidFill>
+                  <a:srgbClr val="22282E"/>
+                </a:solidFill>
+              </a:rPr>
+              <a:t>•  ❓ ¿Forense e incidente son lo mismo?</a:t>
+            </a:r>
+          </a:p>
+          <a:p>
+            <a:pPr>
+              <a:spcAft>
+                <a:spcPts val="600"/>
+              </a:spcAft>
+            </a:pPr>
+            <a:r>
+              <a:rPr sz="1500">
+                <a:solidFill>
+                  <a:srgbClr val="22282E"/>
+                </a:solidFill>
+              </a:rPr>
+              <a:t>•  No. La respuesta a incidentes prioriza contener y recuperar rápido; la forense prioriza el rigor y la reconstrucción defendible. DFIR las integra.</a:t>
+            </a:r>
+          </a:p>
+          <a:p>
+            <a:pPr>
+              <a:spcAft>
+                <a:spcPts val="600"/>
+              </a:spcAft>
+            </a:pPr>
+            <a:r>
+              <a:rPr sz="1500">
+                <a:solidFill>
+                  <a:srgbClr val="22282E"/>
+                </a:solidFill>
+              </a:rPr>
+              <a:t>•  ❓ ¿MD5 sirve todavía?</a:t>
+            </a:r>
+          </a:p>
+          <a:p>
+            <a:pPr>
+              <a:spcAft>
+                <a:spcPts val="600"/>
+              </a:spcAft>
+            </a:pPr>
+            <a:r>
+              <a:rPr sz="1500">
+                <a:solidFill>
+                  <a:srgbClr val="22282E"/>
+                </a:solidFill>
+              </a:rPr>
+              <a:t>•  Para deduplicación y verificación rápida sí, pero por colisiones conocidas prefiere SHA-256 en evidencia que pueda ir a juicio.</a:t>
+            </a:r>
+          </a:p>
+          <a:p>
+            <a:pPr>
+              <a:spcAft>
+                <a:spcPts val="600"/>
+              </a:spcAft>
+            </a:pPr>
+            <a:r>
+              <a:rPr sz="1500">
+                <a:solidFill>
+                  <a:srgbClr val="22282E"/>
+                </a:solidFill>
+              </a:rPr>
+              <a:t>•  ❓ ¿Puedo analizar el disco original directamente?</a:t>
+            </a:r>
+          </a:p>
+          <a:p>
+            <a:pPr>
+              <a:spcAft>
+                <a:spcPts val="600"/>
+              </a:spcAft>
+            </a:pPr>
+            <a:r>
+              <a:rPr sz="1500">
+                <a:solidFill>
+                  <a:srgbClr val="22282E"/>
+                </a:solidFill>
+              </a:rPr>
+              <a:t>•  No. Siempre trabajas sobre una copia forense verificada; el original se preserva con bloqueo de escritura.</a:t>
+            </a:r>
+          </a:p>
+          <a:p>
+            <a:pPr>
+              <a:spcAft>
+                <a:spcPts val="600"/>
+              </a:spcAft>
+            </a:pPr>
+            <a:r>
+              <a:rPr sz="1500">
+                <a:solidFill>
+                  <a:srgbClr val="22282E"/>
+                </a:solidFill>
+              </a:rPr>
+              <a:t>•  ❓ ¿Qué hago si contamino evidencia sin querer?</a:t>
+            </a:r>
+          </a:p>
+        </p:txBody>
+      </p:sp>
+    </p:spTree>
+  </p:cSld>
+  <p:clrMapOvr>
+    <a:masterClrMapping/>
+  </p:clrMapOvr>
+</p:sld>
+</file>
+
+<file path=ppt/slides/slide16.xml><?xml version="1.0" encoding="utf-8"?>
+<p:sld xmlns:a="http://schemas.openxmlformats.org/drawingml/2006/main" xmlns:p="http://schemas.openxmlformats.org/presentationml/2006/main" xmlns:r="http://schemas.openxmlformats.org/officeDocument/2006/relationships">
+  <p:cSld>
+    <p:spTree>
+      <p:nvGrpSpPr>
+        <p:cNvPr id="1" name=""/>
+        <p:cNvGrpSpPr/>
+        <p:nvPr/>
+      </p:nvGrpSpPr>
+      <p:grpSpPr/>
+      <p:sp>
+        <p:nvSpPr>
+          <p:cNvPr id="2" name="TextBox 1"/>
+          <p:cNvSpPr txBox="1"/>
+          <p:nvPr/>
+        </p:nvSpPr>
+        <p:spPr>
+          <a:xfrm>
+            <a:off x="457200" y="320040"/>
+            <a:ext cx="8229600" cy="822960"/>
+          </a:xfrm>
+          <a:prstGeom prst="rect">
+            <a:avLst/>
+          </a:prstGeom>
+          <a:noFill/>
+        </p:spPr>
+        <p:txBody>
+          <a:bodyPr wrap="square">
+            <a:spAutoFit/>
+          </a:bodyPr>
+          <a:lstStyle/>
+          <a:p>
+            <a:r>
+              <a:rPr sz="2600" b="1">
+                <a:solidFill>
+                  <a:srgbClr val="0B3D2E"/>
+                </a:solidFill>
+              </a:rPr>
+              <a:t>🔗 Referencias verificables y alcance</a:t>
+            </a:r>
+          </a:p>
+        </p:txBody>
+      </p:sp>
+      <p:sp>
+        <p:nvSpPr>
+          <p:cNvPr id="3" name="TextBox 2"/>
+          <p:cNvSpPr txBox="1"/>
+          <p:nvPr/>
+        </p:nvSpPr>
+        <p:spPr>
+          <a:xfrm>
+            <a:off x="457200" y="1280160"/>
+            <a:ext cx="8229600" cy="4937760"/>
+          </a:xfrm>
+          <a:prstGeom prst="rect">
+            <a:avLst/>
+          </a:prstGeom>
+          <a:noFill/>
+        </p:spPr>
+        <p:txBody>
+          <a:bodyPr wrap="square">
+            <a:spAutoFit/>
+          </a:bodyPr>
+          <a:lstStyle/>
+          <a:p>
+            <a:pPr>
+              <a:spcAft>
+                <a:spcPts val="600"/>
+              </a:spcAft>
+            </a:pPr>
+            <a:r>
+              <a:rPr sz="1500">
+                <a:solidFill>
+                  <a:srgbClr val="22282E"/>
+                </a:solidFill>
+              </a:rPr>
+              <a:t>•  NIST SP 800-86: fuente primaria para integrar colección, examen, análisis y reporte forense con respuesta; advierte que no es guía legal ni procedimiento exhaustivo —…</a:t>
+            </a:r>
+          </a:p>
+          <a:p>
+            <a:pPr>
+              <a:spcAft>
+                <a:spcPts val="600"/>
+              </a:spcAft>
+            </a:pPr>
+            <a:r>
+              <a:rPr sz="1500">
+                <a:solidFill>
+                  <a:srgbClr val="22282E"/>
+                </a:solidFill>
+              </a:rPr>
+              <a:t>•  RFC 3227 / BCP 55: fuente primaria para orden de volatilidad, notas, reducción de cambios, checksums, archivo y elementos mínimos de cadena de custodia — &lt;https://www.rfc-editor.org/info/rfc3227/&gt;</a:t>
+            </a:r>
+          </a:p>
+          <a:p>
+            <a:pPr>
+              <a:spcAft>
+                <a:spcPts val="600"/>
+              </a:spcAft>
+            </a:pPr>
+            <a:r>
+              <a:rPr sz="1500">
+                <a:solidFill>
+                  <a:srgbClr val="22282E"/>
+                </a:solidFill>
+              </a:rPr>
+              <a:t>•  SWGDE, publicaciones de buenas prácticas: referencia profesional para procedimientos de evidencia digital; el documento aplicable debe identificarse por título y versión —…</a:t>
+            </a:r>
+          </a:p>
+          <a:p>
+            <a:pPr>
+              <a:spcAft>
+                <a:spcPts val="600"/>
+              </a:spcAft>
+            </a:pPr>
+            <a:r>
+              <a:rPr sz="1500">
+                <a:solidFill>
+                  <a:srgbClr val="22282E"/>
+                </a:solidFill>
+              </a:rPr>
+              <a:t>•  Carrier, B. File System Forensic Analysis. Addison-Wesley: bibliografía complementaria para estructuras y métodos de análisis de sistemas de archivos.</a:t>
+            </a:r>
+          </a:p>
+        </p:txBody>
+      </p:sp>
+    </p:spTree>
+  </p:cSld>
+  <p:clrMapOvr>
+    <a:masterClrMapping/>
+  </p:clrMapOvr>
+</p:sld>
+</file>
+
+<file path=ppt/slides/slide17.xml><?xml version="1.0" encoding="utf-8"?>
+<p:sld xmlns:a="http://schemas.openxmlformats.org/drawingml/2006/main" xmlns:p="http://schemas.openxmlformats.org/presentationml/2006/main" xmlns:r="http://schemas.openxmlformats.org/officeDocument/2006/relationships">
+  <p:cSld>
+    <p:spTree>
+      <p:nvGrpSpPr>
+        <p:cNvPr id="1" name=""/>
+        <p:cNvGrpSpPr/>
+        <p:nvPr/>
+      </p:nvGrpSpPr>
+      <p:grpSpPr/>
+      <p:sp>
+        <p:nvSpPr>
+          <p:cNvPr id="2" name="TextBox 1"/>
+          <p:cNvSpPr txBox="1"/>
+          <p:nvPr/>
+        </p:nvSpPr>
+        <p:spPr>
+          <a:xfrm>
+            <a:off x="457200" y="274320"/>
+            <a:ext cx="8229600" cy="640080"/>
+          </a:xfrm>
+          <a:prstGeom prst="rect">
+            <a:avLst/>
+          </a:prstGeom>
+          <a:noFill/>
+        </p:spPr>
+        <p:txBody>
+          <a:bodyPr wrap="square">
+            <a:spAutoFit/>
+          </a:bodyPr>
+          <a:lstStyle/>
+          <a:p>
+            <a:r>
+              <a:rPr sz="2200" b="1">
+                <a:solidFill>
+                  <a:srgbClr val="0B3D2E"/>
+                </a:solidFill>
+              </a:rPr>
+              <a:t>Diagrama de la clase</a:t>
+            </a:r>
+          </a:p>
+        </p:txBody>
+      </p:sp>
+      <p:pic>
+        <p:nvPicPr>
+          <p:cNvPr id="3" name="Picture 2" descr="92bbf406a20c98dc.png"/>
+          <p:cNvPicPr>
+            <a:picLocks noChangeAspect="1"/>
+          </p:cNvPicPr>
+          <p:nvPr/>
+        </p:nvPicPr>
+        <p:blipFill>
+          <a:blip r:embed="rId2"/>
+          <a:stretch>
+            <a:fillRect/>
+          </a:stretch>
+        </p:blipFill>
+        <p:spPr>
+          <a:xfrm>
+            <a:off x="457200" y="3543300"/>
+            <a:ext cx="8229600" cy="411480"/>
+          </a:xfrm>
+          <a:prstGeom prst="rect">
+            <a:avLst/>
+          </a:prstGeom>
+        </p:spPr>
+      </p:pic>
     </p:spTree>
   </p:cSld>
   <p:clrMapOvr>
@@ -3698,7 +4344,7 @@
                   <a:srgbClr val="22282E"/>
                 </a:solidFill>
               </a:rPr>
-              <a:t>•  Comprender qué es DFIR, en qué se diferencia la respuesta a incidentes del análisis forense, y por qué la cadena de custodia y la integridad de la evidencia son el cimiento innegociable de todo el trabajo posterior. Al terminar sabrás tratar un equipo comprometido de forma que cualquier hallazgo sea técnicamente sólido y legalmente defendible.</a:t>
+              <a:t>•  Comprender qué es DFIR, en qué se diferencia la respuesta a incidentes del análisis forense, y por qué la cadena de custodia y la integridad de la evidencia son el cimiento innegociable de todo el…</a:t>
             </a:r>
           </a:p>
         </p:txBody>
@@ -4092,7 +4738,7 @@
                   <a:srgbClr val="0B3D2E"/>
                 </a:solidFill>
               </a:rPr>
-              <a:t>📖 Definiciones y características</a:t>
+              <a:t>🧠 Explicación en profundidad</a:t>
             </a:r>
           </a:p>
         </p:txBody>
@@ -4130,97 +4776,97 @@
                   <a:srgbClr val="22282E"/>
                 </a:solidFill>
               </a:rPr>
-              <a:t>•  DFIR: unión de Digital Forensics (análisis riguroso post-mortem) e Incident Response (contención y recuperación rápida). Característica clave: tensión entre velocidad y rigor, que hay que equilibrar en cada caso.</a:t>
-            </a:r>
-          </a:p>
-          <a:p>
-            <a:pPr>
-              <a:spcAft>
-                <a:spcPts val="600"/>
-              </a:spcAft>
-            </a:pPr>
-            <a:r>
-              <a:rPr sz="1500">
-                <a:solidFill>
-                  <a:srgbClr val="22282E"/>
-                </a:solidFill>
-              </a:rPr>
-              <a:t>•  Principio de intercambio de Locard: todo contacto deja un rastro. En digital: cada acción de un atacante (o del propio analista) altera algún estado. Característica: nunca hay "cero huella".</a:t>
-            </a:r>
-          </a:p>
-          <a:p>
-            <a:pPr>
-              <a:spcAft>
-                <a:spcPts val="600"/>
-              </a:spcAft>
-            </a:pPr>
-            <a:r>
-              <a:rPr sz="1500">
-                <a:solidFill>
-                  <a:srgbClr val="22282E"/>
-                </a:solidFill>
-              </a:rPr>
-              <a:t>•  Orden de volatilidad: prioridad de captura según cuán rápido desaparece un dato (registros de CPU → RAM → conexiones → disco → backups). Característica: la RAM se pierde al apagar; el disco persiste.</a:t>
-            </a:r>
-          </a:p>
-          <a:p>
-            <a:pPr>
-              <a:spcAft>
-                <a:spcPts val="600"/>
-              </a:spcAft>
-            </a:pPr>
-            <a:r>
-              <a:rPr sz="1500">
-                <a:solidFill>
-                  <a:srgbClr val="22282E"/>
-                </a:solidFill>
-              </a:rPr>
-              <a:t>•  Cadena de custodia: registro documental de quién tuvo la evidencia, cuándo, dónde y qué hizo con ella. Característica: cualquier hueco la invalida.</a:t>
-            </a:r>
-          </a:p>
-          <a:p>
-            <a:pPr>
-              <a:spcAft>
-                <a:spcPts val="600"/>
-              </a:spcAft>
-            </a:pPr>
-            <a:r>
-              <a:rPr sz="1500">
-                <a:solidFill>
-                  <a:srgbClr val="22282E"/>
-                </a:solidFill>
-              </a:rPr>
-              <a:t>•  Hash de integridad: huella criptográfica (SHA-256) que prueba que un artefacto no cambió. Característica: un solo bit distinto cambia el hash entero.</a:t>
-            </a:r>
-          </a:p>
-          <a:p>
-            <a:pPr>
-              <a:spcAft>
-                <a:spcPts val="600"/>
-              </a:spcAft>
-            </a:pPr>
-            <a:r>
-              <a:rPr sz="1500">
-                <a:solidFill>
-                  <a:srgbClr val="22282E"/>
-                </a:solidFill>
-              </a:rPr>
-              <a:t>•  Bloqueador de escritura (write blocker): hardware o software que permite leer un medio sin escribir en él. Característica: garantiza que el original permanece intacto.</a:t>
-            </a:r>
-          </a:p>
-          <a:p>
-            <a:pPr>
-              <a:spcAft>
-                <a:spcPts val="600"/>
-              </a:spcAft>
-            </a:pPr>
-            <a:r>
-              <a:rPr sz="1500">
-                <a:solidFill>
-                  <a:srgbClr val="22282E"/>
-                </a:solidFill>
-              </a:rPr>
-              <a:t>•  Evidencia volátil vs. persistente: la volátil (RAM, procesos) muere al apagar; la persistente (disco) sobrevive. Característica: determina la estrategia de adquisición.</a:t>
+              <a:t>•  DFIR combina dos objetivos que pueden tensionarse: restaurar una operación segura y preservar evidencia suficiente para explicar lo ocurrido. La prioridad depende de vida, servicio, regulación y…</a:t>
+            </a:r>
+          </a:p>
+          <a:p>
+            <a:pPr>
+              <a:spcAft>
+                <a:spcPts val="600"/>
+              </a:spcAft>
+            </a:pPr>
+            <a:r>
+              <a:rPr sz="1500">
+                <a:solidFill>
+                  <a:srgbClr val="22282E"/>
+                </a:solidFill>
+              </a:rPr>
+              <a:t>•  La cadena de custodia registra quién controló el elemento, cuándo, dónde, por qué y qué acción realizó. Un hash demuestra igualdad de bits entre dos momentos, no quién obtuvo la evidencia ni si el…</a:t>
+            </a:r>
+          </a:p>
+          <a:p>
+            <a:pPr>
+              <a:spcAft>
+                <a:spcPts val="600"/>
+              </a:spcAft>
+            </a:pPr>
+            <a:r>
+              <a:rPr sz="1500">
+                <a:solidFill>
+                  <a:srgbClr val="22282E"/>
+                </a:solidFill>
+              </a:rPr>
+              <a:t>•  Respuesta busca limitar impacto y recuperar operación; forense busca preservar e interpretar rastros de manera reproducible. Aislar un host puede ser urgente aunque cambie conexiones; adquirir…</a:t>
+            </a:r>
+          </a:p>
+          <a:p>
+            <a:pPr>
+              <a:spcAft>
+                <a:spcPts val="600"/>
+              </a:spcAft>
+            </a:pPr>
+            <a:r>
+              <a:rPr sz="1500">
+                <a:solidFill>
+                  <a:srgbClr val="22282E"/>
+                </a:solidFill>
+              </a:rPr>
+              <a:t>•  Un disco encontrado no se vuelve evidencia solo por guardarlo. Se asigna identificador único, se fotografía estado, se registra ubicación, custodio, fecha y autoridad, y se sella. Cada transferencia…</a:t>
+            </a:r>
+          </a:p>
+          <a:p>
+            <a:pPr>
+              <a:spcAft>
+                <a:spcPts val="600"/>
+              </a:spcAft>
+            </a:pPr>
+            <a:r>
+              <a:rPr sz="1500">
+                <a:solidFill>
+                  <a:srgbClr val="22282E"/>
+                </a:solidFill>
+              </a:rPr>
+              <a:t>•  El hash responde «¿estos bytes son iguales a los verificados?». No demuestra que el reloj fuese correcto, que el dispositivo perteneciera al sospechoso o que la herramienta interpretara bien el…</a:t>
+            </a:r>
+          </a:p>
+          <a:p>
+            <a:pPr>
+              <a:spcAft>
+                <a:spcPts val="600"/>
+              </a:spcAft>
+            </a:pPr>
+            <a:r>
+              <a:rPr sz="1500">
+                <a:solidFill>
+                  <a:srgbClr val="22282E"/>
+                </a:solidFill>
+              </a:rPr>
+              <a:t>•  El orden de volatilidad prioriza datos que desaparecen antes: conexiones, procesos y RAM suelen preceder a discos y copias remotas, pero el orden se ajusta a riesgo y autorización. Cada comando…</a:t>
+            </a:r>
+          </a:p>
+          <a:p>
+            <a:pPr>
+              <a:spcAft>
+                <a:spcPts val="600"/>
+              </a:spcAft>
+            </a:pPr>
+            <a:r>
+              <a:rPr sz="1500">
+                <a:solidFill>
+                  <a:srgbClr val="22282E"/>
+                </a:solidFill>
+              </a:rPr>
+              <a:t>•  El informe separa observación —«el hash calculado fue…»—, inferencia —«la evidencia es consistente con ejecución»— e hipótesis. El principio de Locard sugiere que toda interacción deja rastros, pero…</a:t>
             </a:r>
           </a:p>
         </p:txBody>
@@ -4271,7 +4917,7 @@
                   <a:srgbClr val="0B3D2E"/>
                 </a:solidFill>
               </a:rPr>
-              <a:t>🧰 Herramientas y preparación</a:t>
+              <a:t>📔 Glosario</a:t>
             </a:r>
           </a:p>
         </p:txBody>
@@ -4309,37 +4955,97 @@
                   <a:srgbClr val="22282E"/>
                 </a:solidFill>
               </a:rPr>
-              <a:t>•  Entorno: máquina virtual con Kali Linux o SIFT Workstation (SANS). Trabaja siempre en un laboratorio aislado y con equipos propios o con autorización explícita por escrito.</a:t>
-            </a:r>
-          </a:p>
-          <a:p>
-            <a:pPr>
-              <a:spcAft>
-                <a:spcPts val="600"/>
-              </a:spcAft>
-            </a:pPr>
-            <a:r>
-              <a:rPr sz="1500">
-                <a:solidFill>
-                  <a:srgbClr val="22282E"/>
-                </a:solidFill>
-              </a:rPr>
-              <a:t>•  Herramientas: sha256sum, md5sum, hashdeep, un editor de texto para el formulario de custodia, y una plantilla de cadena de custodia (puedes usar la de NIST o SANS).</a:t>
-            </a:r>
-          </a:p>
-          <a:p>
-            <a:pPr>
-              <a:spcAft>
-                <a:spcPts val="600"/>
-              </a:spcAft>
-            </a:pPr>
-            <a:r>
-              <a:rPr sz="1500">
-                <a:solidFill>
-                  <a:srgbClr val="22282E"/>
-                </a:solidFill>
-              </a:rPr>
-              <a:t>•  Material físico simulado: bolsas antiestáticas con etiqueta, marcador indeleble, cuaderno de notas foliado.</a:t>
+              <a:t>•  DFIR: forense digital y respuesta a incidentes.</a:t>
+            </a:r>
+          </a:p>
+          <a:p>
+            <a:pPr>
+              <a:spcAft>
+                <a:spcPts val="600"/>
+              </a:spcAft>
+            </a:pPr>
+            <a:r>
+              <a:rPr sz="1500">
+                <a:solidFill>
+                  <a:srgbClr val="22282E"/>
+                </a:solidFill>
+              </a:rPr>
+              <a:t>•  Evidencia: información con valor para una investigación.</a:t>
+            </a:r>
+          </a:p>
+          <a:p>
+            <a:pPr>
+              <a:spcAft>
+                <a:spcPts val="600"/>
+              </a:spcAft>
+            </a:pPr>
+            <a:r>
+              <a:rPr sz="1500">
+                <a:solidFill>
+                  <a:srgbClr val="22282E"/>
+                </a:solidFill>
+              </a:rPr>
+              <a:t>•  Cadena de custodia: historial continuo de control y transferencias.</a:t>
+            </a:r>
+          </a:p>
+          <a:p>
+            <a:pPr>
+              <a:spcAft>
+                <a:spcPts val="600"/>
+              </a:spcAft>
+            </a:pPr>
+            <a:r>
+              <a:rPr sz="1500">
+                <a:solidFill>
+                  <a:srgbClr val="22282E"/>
+                </a:solidFill>
+              </a:rPr>
+              <a:t>•  Integridad: ausencia de cambio no explicado.</a:t>
+            </a:r>
+          </a:p>
+          <a:p>
+            <a:pPr>
+              <a:spcAft>
+                <a:spcPts val="600"/>
+              </a:spcAft>
+            </a:pPr>
+            <a:r>
+              <a:rPr sz="1500">
+                <a:solidFill>
+                  <a:srgbClr val="22282E"/>
+                </a:solidFill>
+              </a:rPr>
+              <a:t>•  Hash: resumen usado para comparar contenido.</a:t>
+            </a:r>
+          </a:p>
+          <a:p>
+            <a:pPr>
+              <a:spcAft>
+                <a:spcPts val="600"/>
+              </a:spcAft>
+            </a:pPr>
+            <a:r>
+              <a:rPr sz="1500">
+                <a:solidFill>
+                  <a:srgbClr val="22282E"/>
+                </a:solidFill>
+              </a:rPr>
+              <a:t>•  Original/copia de trabajo: evidencia preservada y duplicado analizado.</a:t>
+            </a:r>
+          </a:p>
+          <a:p>
+            <a:pPr>
+              <a:spcAft>
+                <a:spcPts val="600"/>
+              </a:spcAft>
+            </a:pPr>
+            <a:r>
+              <a:rPr sz="1500">
+                <a:solidFill>
+                  <a:srgbClr val="22282E"/>
+                </a:solidFill>
+              </a:rPr>
+              <a:t>•  Orden de volatilidad: prioridad según rapidez con que desaparecen datos.</a:t>
             </a:r>
           </a:p>
         </p:txBody>
@@ -4390,7 +5096,7 @@
                   <a:srgbClr val="0B3D2E"/>
                 </a:solidFill>
               </a:rPr>
-              <a:t>🧪 Laboratorio guiado</a:t>
+              <a:t>📖 Definiciones y características</a:t>
             </a:r>
           </a:p>
         </p:txBody>
@@ -4428,97 +5134,97 @@
                   <a:srgbClr val="22282E"/>
                 </a:solidFill>
               </a:rPr>
-              <a:t>•  Crea un archivo que simule evidencia adquirida:</a:t>
-            </a:r>
-          </a:p>
-          <a:p>
-            <a:pPr>
-              <a:spcAft>
-                <a:spcPts val="600"/>
-              </a:spcAft>
-            </a:pPr>
-            <a:r>
-              <a:rPr sz="1500">
-                <a:solidFill>
-                  <a:srgbClr val="22282E"/>
-                </a:solidFill>
-              </a:rPr>
-              <a:t>•  dd if=/dev/urandom of=evidencia.img bs=1M count=50</a:t>
-            </a:r>
-          </a:p>
-          <a:p>
-            <a:pPr>
-              <a:spcAft>
-                <a:spcPts val="600"/>
-              </a:spcAft>
-            </a:pPr>
-            <a:r>
-              <a:rPr sz="1500">
-                <a:solidFill>
-                  <a:srgbClr val="22282E"/>
-                </a:solidFill>
-              </a:rPr>
-              <a:t>•  Calcula y guarda su hash de integridad al momento de la "adquisición":</a:t>
-            </a:r>
-          </a:p>
-          <a:p>
-            <a:pPr>
-              <a:spcAft>
-                <a:spcPts val="600"/>
-              </a:spcAft>
-            </a:pPr>
-            <a:r>
-              <a:rPr sz="1500">
-                <a:solidFill>
-                  <a:srgbClr val="22282E"/>
-                </a:solidFill>
-              </a:rPr>
-              <a:t>•  sha256sum evidencia.img | tee evidencia.sha256</a:t>
-            </a:r>
-          </a:p>
-          <a:p>
-            <a:pPr>
-              <a:spcAft>
-                <a:spcPts val="600"/>
-              </a:spcAft>
-            </a:pPr>
-            <a:r>
-              <a:rPr sz="1500">
-                <a:solidFill>
-                  <a:srgbClr val="22282E"/>
-                </a:solidFill>
-              </a:rPr>
-              <a:t>•  Redacta el formulario de cadena de custodia con estos campos mínimos:</a:t>
-            </a:r>
-          </a:p>
-          <a:p>
-            <a:pPr>
-              <a:spcAft>
-                <a:spcPts val="600"/>
-              </a:spcAft>
-            </a:pPr>
-            <a:r>
-              <a:rPr sz="1500">
-                <a:solidFill>
-                  <a:srgbClr val="22282E"/>
-                </a:solidFill>
-              </a:rPr>
-              <a:t>•  Identificador único del ítem (ej. CASO-2026-001-ITEM-01).</a:t>
-            </a:r>
-          </a:p>
-          <a:p>
-            <a:pPr>
-              <a:spcAft>
-                <a:spcPts val="600"/>
-              </a:spcAft>
-            </a:pPr>
-            <a:r>
-              <a:rPr sz="1500">
-                <a:solidFill>
-                  <a:srgbClr val="22282E"/>
-                </a:solidFill>
-              </a:rPr>
-              <a:t>•  Descripción, fabricante, número de serie.</a:t>
+              <a:t>•  DFIR: unión de Digital Forensics (análisis riguroso post-mortem) e Incident Response (contención y recuperación rápida). Característica clave: tensión entre velocidad y rigor, que hay que equilibrar…</a:t>
+            </a:r>
+          </a:p>
+          <a:p>
+            <a:pPr>
+              <a:spcAft>
+                <a:spcPts val="600"/>
+              </a:spcAft>
+            </a:pPr>
+            <a:r>
+              <a:rPr sz="1500">
+                <a:solidFill>
+                  <a:srgbClr val="22282E"/>
+                </a:solidFill>
+              </a:rPr>
+              <a:t>•  Principio de intercambio de Locard: propone que una interacción puede transferir rastros. En digital orienta dónde buscar cambios, pero no asegura que sean registrados, preservados o atribuibles.</a:t>
+            </a:r>
+          </a:p>
+          <a:p>
+            <a:pPr>
+              <a:spcAft>
+                <a:spcPts val="600"/>
+              </a:spcAft>
+            </a:pPr>
+            <a:r>
+              <a:rPr sz="1500">
+                <a:solidFill>
+                  <a:srgbClr val="22282E"/>
+                </a:solidFill>
+              </a:rPr>
+              <a:t>•  Orden de volatilidad: prioridad de captura según cuán rápido desaparece un dato (registros de CPU → RAM → conexiones → disco → backups). Característica: la RAM se pierde al apagar; el disco persiste.</a:t>
+            </a:r>
+          </a:p>
+          <a:p>
+            <a:pPr>
+              <a:spcAft>
+                <a:spcPts val="600"/>
+              </a:spcAft>
+            </a:pPr>
+            <a:r>
+              <a:rPr sz="1500">
+                <a:solidFill>
+                  <a:srgbClr val="22282E"/>
+                </a:solidFill>
+              </a:rPr>
+              <a:t>•  Cadena de custodia: registro documental de quién controló la evidencia, cuándo, dónde, para qué y qué hizo con ella. Característica: un vacío debe declararse y evaluarse; su consecuencia jurídica…</a:t>
+            </a:r>
+          </a:p>
+          <a:p>
+            <a:pPr>
+              <a:spcAft>
+                <a:spcPts val="600"/>
+              </a:spcAft>
+            </a:pPr>
+            <a:r>
+              <a:rPr sz="1500">
+                <a:solidFill>
+                  <a:srgbClr val="22282E"/>
+                </a:solidFill>
+              </a:rPr>
+              <a:t>•  Hash de integridad: resumen criptográfico usado para comparar bytes entre momentos o copias. Característica: una coincidencia apoya igualdad de contenido, no valida procedencia ni interpretación.</a:t>
+            </a:r>
+          </a:p>
+          <a:p>
+            <a:pPr>
+              <a:spcAft>
+                <a:spcPts val="600"/>
+              </a:spcAft>
+            </a:pPr>
+            <a:r>
+              <a:rPr sz="1500">
+                <a:solidFill>
+                  <a:srgbClr val="22282E"/>
+                </a:solidFill>
+              </a:rPr>
+              <a:t>•  Bloqueador de escritura (write blocker): hardware o software diseñado para impedir escrituras al medio. Característica: debe verificarse; su sola presencia no demuestra ausencia de cambios.</a:t>
+            </a:r>
+          </a:p>
+          <a:p>
+            <a:pPr>
+              <a:spcAft>
+                <a:spcPts val="600"/>
+              </a:spcAft>
+            </a:pPr>
+            <a:r>
+              <a:rPr sz="1500">
+                <a:solidFill>
+                  <a:srgbClr val="22282E"/>
+                </a:solidFill>
+              </a:rPr>
+              <a:t>•  Evidencia volátil vs. persistente: la volátil (RAM, procesos) muere al apagar; la persistente (disco) sobrevive. Característica: determina la estrategia de adquisición.</a:t>
             </a:r>
           </a:p>
         </p:txBody>
@@ -4569,7 +5275,7 @@
                   <a:srgbClr val="0B3D2E"/>
                 </a:solidFill>
               </a:rPr>
-              <a:t>✍️ Ejercicios</a:t>
+              <a:t>🔍 Caso razonado — servidor encendido con volumen cifrado</a:t>
             </a:r>
           </a:p>
         </p:txBody>
@@ -4607,82 +5313,22 @@
                   <a:srgbClr val="22282E"/>
                 </a:solidFill>
               </a:rPr>
-              <a:t>•  Enumera, en orden de volatilidad, siete fuentes de evidencia de un portátil encendido.</a:t>
-            </a:r>
-          </a:p>
-          <a:p>
-            <a:pPr>
-              <a:spcAft>
-                <a:spcPts val="600"/>
-              </a:spcAft>
-            </a:pPr>
-            <a:r>
-              <a:rPr sz="1500">
-                <a:solidFill>
-                  <a:srgbClr val="22282E"/>
-                </a:solidFill>
-              </a:rPr>
-              <a:t>•  Redacta una plantilla de cadena de custodia con al menos diez campos.</a:t>
-            </a:r>
-          </a:p>
-          <a:p>
-            <a:pPr>
-              <a:spcAft>
-                <a:spcPts val="600"/>
-              </a:spcAft>
-            </a:pPr>
-            <a:r>
-              <a:rPr sz="1500">
-                <a:solidFill>
-                  <a:srgbClr val="22282E"/>
-                </a:solidFill>
-              </a:rPr>
-              <a:t>•  Explica con un ejemplo por qué apagar "correctamente" un equipo puede destruir evidencia.</a:t>
-            </a:r>
-          </a:p>
-          <a:p>
-            <a:pPr>
-              <a:spcAft>
-                <a:spcPts val="600"/>
-              </a:spcAft>
-            </a:pPr>
-            <a:r>
-              <a:rPr sz="1500">
-                <a:solidFill>
-                  <a:srgbClr val="22282E"/>
-                </a:solidFill>
-              </a:rPr>
-              <a:t>•  Genera hashes MD5 y SHA-256 del mismo archivo y explica por qué preferimos SHA-256.</a:t>
-            </a:r>
-          </a:p>
-          <a:p>
-            <a:pPr>
-              <a:spcAft>
-                <a:spcPts val="600"/>
-              </a:spcAft>
-            </a:pPr>
-            <a:r>
-              <a:rPr sz="1500">
-                <a:solidFill>
-                  <a:srgbClr val="22282E"/>
-                </a:solidFill>
-              </a:rPr>
-              <a:t>•  Diseña un procedimiento para etiquetar y fotografiar tres dispositivos incautados.</a:t>
-            </a:r>
-          </a:p>
-          <a:p>
-            <a:pPr>
-              <a:spcAft>
-                <a:spcPts val="600"/>
-              </a:spcAft>
-            </a:pPr>
-            <a:r>
-              <a:rPr sz="1500">
-                <a:solidFill>
-                  <a:srgbClr val="22282E"/>
-                </a:solidFill>
-              </a:rPr>
-              <a:t>•  Analiza un caso: un analista copió archivos con arrastrar-y-soltar desde el disco sospechoso. ¿Qué cinco cosas hizo mal?</a:t>
+              <a:t>•  Un servidor crítico presenta conexiones anómalas. El volumen está cifrado y montado; apagarlo puede perder claves y sesiones, pero seguir operando permite cambios. El responsable del incidente…</a:t>
+            </a:r>
+          </a:p>
+          <a:p>
+            <a:pPr>
+              <a:spcAft>
+                <a:spcPts val="600"/>
+              </a:spcAft>
+            </a:pPr>
+            <a:r>
+              <a:rPr sz="1500">
+                <a:solidFill>
+                  <a:srgbClr val="22282E"/>
+                </a:solidFill>
+              </a:rPr>
+              <a:t>•  La bitácora registra quién autorizó, qué comandos se ejecutaron, con qué binarios verificados, a qué hora y qué efectos se observaron. El hash de la memoria demuestra que la copia analizada conserva…</a:t>
             </a:r>
           </a:p>
         </p:txBody>
@@ -4733,7 +5379,7 @@
                   <a:srgbClr val="0B3D2E"/>
                 </a:solidFill>
               </a:rPr>
-              <a:t>📝 Reto verificable</a:t>
+              <a:t>✅ Criterio de dominio</a:t>
             </a:r>
           </a:p>
         </p:txBody>
@@ -4771,22 +5417,7 @@
                   <a:srgbClr val="22282E"/>
                 </a:solidFill>
               </a:rPr>
-              <a:t>•  Adquiere una imagen de un pendrive propio (o de un archivo .img que crees), documenta su cadena de custodia completa y verifica integridad antes y después de una transferencia simulada.</a:t>
-            </a:r>
-          </a:p>
-          <a:p>
-            <a:pPr>
-              <a:spcAft>
-                <a:spcPts val="600"/>
-              </a:spcAft>
-            </a:pPr>
-            <a:r>
-              <a:rPr sz="1500">
-                <a:solidFill>
-                  <a:srgbClr val="22282E"/>
-                </a:solidFill>
-              </a:rPr>
-              <a:t>•  Criterio de aceptación: entregas (a) el .img, (b) su hash SHA-256 en un archivo separado, (c) un formulario de custodia con al menos una transferencia registrada, y (d) la salida de sha256sum -c mostrando OK. Si alteras un byte, la verificación debe fallar y tú debes haberlo documentado.</a:t>
+              <a:t>•  El alumno domina la clase cuando puede justificar un orden de adquisición adaptado al caso, mantener una cadena de custodia completa y explicar los límites del hash y de Locard. Una lista genérica de…</a:t>
             </a:r>
           </a:p>
         </p:txBody>
